--- a/dist/초1/수학/모양과비교/초1_수학_모양과비교_04_무게·넓이·담을수있는양비교_학생용.pptx
+++ b/dist/초1/수학/모양과비교/초1_수학_모양과비교_04_무게·넓이·담을수있는양비교_학생용.pptx
@@ -120,13 +120,13 @@
   <p:extLst>
     <p:ext uri="{521415D9-36F7-43E2-AB2F-B90AF26B5E84}">
       <p14:sectionLst xmlns:p14="http://schemas.microsoft.com/office/powerpoint/2010/main">
-        <p14:section name="도입" id="{e222652f-0529-a43c-b9ed-f33b5cd17096}">
+        <p14:section name="도입" id="{ae84787e-97fe-fe80-bf15-d6e4c2f6679f}">
           <p14:sldIdLst>
             <p14:sldId id="256"/>
             <p14:sldId id="257"/>
           </p14:sldIdLst>
         </p14:section>
-        <p14:section name="개념" id="{0838e300-63e5-6a06-00c9-d2bb5abdccba}">
+        <p14:section name="개념" id="{070acfec-dd69-2bcd-469b-dbb04101af7c}">
           <p14:sldIdLst>
             <p14:sldId id="258"/>
             <p14:sldId id="261"/>
@@ -134,7 +134,7 @@
             <p14:sldId id="264"/>
           </p14:sldIdLst>
         </p14:section>
-        <p14:section name="연습" id="{2a2c9f04-f824-7c3d-afb4-cd9ed00305b1}">
+        <p14:section name="연습" id="{7f528d38-bd1a-b60b-ca6c-fc24fa42f8b2}">
           <p14:sldIdLst>
             <p14:sldId id="259"/>
             <p14:sldId id="260"/>
@@ -142,30 +142,30 @@
             <p14:sldId id="265"/>
           </p14:sldIdLst>
         </p14:section>
-        <p14:section name="개념" id="{a3ba7d9f-42c3-e8f5-b496-32cccdf3d872}">
+        <p14:section name="개념" id="{eb8e4c7a-6f7f-3d48-d4c1-018a38822b3d}">
           <p14:sldIdLst/>
         </p14:section>
-        <p14:section name="연습" id="{0107e56c-df41-2c46-6c20-84bc0e640f61}">
+        <p14:section name="연습" id="{6948585e-b32a-d945-63e8-2391bc778f46}">
           <p14:sldIdLst/>
         </p14:section>
-        <p14:section name="개념" id="{1e0daa31-6abd-36d6-22ef-f7263aecbd6f}">
+        <p14:section name="개념" id="{7eaae9ab-5dfe-ab55-9b3f-b04242a74267}">
           <p14:sldIdLst/>
         </p14:section>
-        <p14:section name="연습" id="{8ca14e68-ad67-67f6-664b-47db894095e8}">
+        <p14:section name="연습" id="{7d83f07b-3449-06f1-3769-75eaf7acae15}">
           <p14:sldIdLst/>
         </p14:section>
-        <p14:section name="확인" id="{f82f97b3-122f-e641-4b44-5be63687a6d1}">
+        <p14:section name="확인" id="{606425b6-2842-ceec-dd9a-116313debc86}">
           <p14:sldIdLst>
             <p14:sldId id="266"/>
             <p14:sldId id="267"/>
           </p14:sldIdLst>
         </p14:section>
-        <p14:section name="정리" id="{09d1ef5c-e05d-e8e3-5133-5d5eb3e50aa0}">
+        <p14:section name="정리" id="{7c10146a-f035-bddf-76be-88285b6dd8e5}">
           <p14:sldIdLst>
             <p14:sldId id="268"/>
           </p14:sldIdLst>
         </p14:section>
-        <p14:section name="보충" id="{85571162-d3b2-e588-c082-482f17c8ab5c}">
+        <p14:section name="보충" id="{92150b78-47b4-37ee-a422-2c6f904e0e9e}">
           <p14:sldIdLst>
             <p14:sldId id="269"/>
           </p14:sldIdLst>
@@ -3127,7 +3127,7 @@
                 <a:ea typeface="맑은 고딕" pitchFamily="34" charset="-122"/>
                 <a:cs typeface="맑은 고딕" pitchFamily="34" charset="-120"/>
               </a:rPr>
-              <a:t>어느 컵에 더 많이 담길까요?</a:t>
+              <a:t>더 많이 담기는 컵은?</a:t>
             </a:r>
             <a:endParaRPr lang="ko-KR" sz="4400" dirty="0"/>
           </a:p>

--- a/dist/초1/수학/모양과비교/초1_수학_모양과비교_04_무게·넓이·담을수있는양비교_학생용.pptx
+++ b/dist/초1/수학/모양과비교/초1_수학_모양과비교_04_무게·넓이·담을수있는양비교_학생용.pptx
@@ -120,13 +120,13 @@
   <p:extLst>
     <p:ext uri="{521415D9-36F7-43E2-AB2F-B90AF26B5E84}">
       <p14:sectionLst xmlns:p14="http://schemas.microsoft.com/office/powerpoint/2010/main">
-        <p14:section name="도입" id="{ae84787e-97fe-fe80-bf15-d6e4c2f6679f}">
+        <p14:section name="도입" id="{0f473d75-9ed7-50c5-3574-dddaac222752}">
           <p14:sldIdLst>
             <p14:sldId id="256"/>
             <p14:sldId id="257"/>
           </p14:sldIdLst>
         </p14:section>
-        <p14:section name="개념" id="{070acfec-dd69-2bcd-469b-dbb04101af7c}">
+        <p14:section name="개념" id="{784de817-9e3b-51fe-2c32-74345d923b16}">
           <p14:sldIdLst>
             <p14:sldId id="258"/>
             <p14:sldId id="261"/>
@@ -134,7 +134,7 @@
             <p14:sldId id="264"/>
           </p14:sldIdLst>
         </p14:section>
-        <p14:section name="연습" id="{7f528d38-bd1a-b60b-ca6c-fc24fa42f8b2}">
+        <p14:section name="연습" id="{bfc89ad8-d974-ad20-38c7-7f398ee028af}">
           <p14:sldIdLst>
             <p14:sldId id="259"/>
             <p14:sldId id="260"/>
@@ -142,30 +142,30 @@
             <p14:sldId id="265"/>
           </p14:sldIdLst>
         </p14:section>
-        <p14:section name="개념" id="{eb8e4c7a-6f7f-3d48-d4c1-018a38822b3d}">
+        <p14:section name="개념" id="{c90e248d-2521-eef0-27fe-ba25df2a89a1}">
           <p14:sldIdLst/>
         </p14:section>
-        <p14:section name="연습" id="{6948585e-b32a-d945-63e8-2391bc778f46}">
+        <p14:section name="연습" id="{69d40d16-5368-9582-8057-4a6e9bed7225}">
           <p14:sldIdLst/>
         </p14:section>
-        <p14:section name="개념" id="{7eaae9ab-5dfe-ab55-9b3f-b04242a74267}">
+        <p14:section name="개념" id="{d73363f6-cb7b-a0de-5bf8-baa943f41098}">
           <p14:sldIdLst/>
         </p14:section>
-        <p14:section name="연습" id="{7d83f07b-3449-06f1-3769-75eaf7acae15}">
+        <p14:section name="연습" id="{6d5e946f-7d20-5720-43d6-bd8ff4dc2a15}">
           <p14:sldIdLst/>
         </p14:section>
-        <p14:section name="확인" id="{606425b6-2842-ceec-dd9a-116313debc86}">
+        <p14:section name="확인" id="{f58ee1c0-a375-530a-ebcb-9a526fc1c085}">
           <p14:sldIdLst>
             <p14:sldId id="266"/>
             <p14:sldId id="267"/>
           </p14:sldIdLst>
         </p14:section>
-        <p14:section name="정리" id="{7c10146a-f035-bddf-76be-88285b6dd8e5}">
+        <p14:section name="정리" id="{8f9a2ca7-e378-cac6-abc7-1c287deac705}">
           <p14:sldIdLst>
             <p14:sldId id="268"/>
           </p14:sldIdLst>
         </p14:section>
-        <p14:section name="보충" id="{92150b78-47b4-37ee-a422-2c6f904e0e9e}">
+        <p14:section name="보충" id="{d5cecb6a-8678-516c-23b7-103dd0be0646}">
           <p14:sldIdLst>
             <p14:sldId id="269"/>
           </p14:sldIdLst>

--- a/dist/초1/수학/모양과비교/초1_수학_모양과비교_04_무게·넓이·담을수있는양비교_학생용.pptx
+++ b/dist/초1/수학/모양과비교/초1_수학_모양과비교_04_무게·넓이·담을수있는양비교_학생용.pptx
@@ -120,13 +120,13 @@
   <p:extLst>
     <p:ext uri="{521415D9-36F7-43E2-AB2F-B90AF26B5E84}">
       <p14:sectionLst xmlns:p14="http://schemas.microsoft.com/office/powerpoint/2010/main">
-        <p14:section name="도입" id="{0f473d75-9ed7-50c5-3574-dddaac222752}">
+        <p14:section name="도입" id="{124d43f8-3a8b-21ba-5e49-cba371202baa}">
           <p14:sldIdLst>
             <p14:sldId id="256"/>
             <p14:sldId id="257"/>
           </p14:sldIdLst>
         </p14:section>
-        <p14:section name="개념" id="{784de817-9e3b-51fe-2c32-74345d923b16}">
+        <p14:section name="개념" id="{4738fd05-3c99-b4e0-357d-dd8ee1c22c3b}">
           <p14:sldIdLst>
             <p14:sldId id="258"/>
             <p14:sldId id="261"/>
@@ -134,7 +134,7 @@
             <p14:sldId id="264"/>
           </p14:sldIdLst>
         </p14:section>
-        <p14:section name="연습" id="{bfc89ad8-d974-ad20-38c7-7f398ee028af}">
+        <p14:section name="연습" id="{684779aa-b2c1-df13-cf15-6639ab5cd781}">
           <p14:sldIdLst>
             <p14:sldId id="259"/>
             <p14:sldId id="260"/>
@@ -142,30 +142,30 @@
             <p14:sldId id="265"/>
           </p14:sldIdLst>
         </p14:section>
-        <p14:section name="개념" id="{c90e248d-2521-eef0-27fe-ba25df2a89a1}">
+        <p14:section name="개념" id="{95336997-a816-ee36-bef7-95c64e913125}">
           <p14:sldIdLst/>
         </p14:section>
-        <p14:section name="연습" id="{69d40d16-5368-9582-8057-4a6e9bed7225}">
+        <p14:section name="연습" id="{9db90822-01ea-168e-5273-1212c52939a9}">
           <p14:sldIdLst/>
         </p14:section>
-        <p14:section name="개념" id="{d73363f6-cb7b-a0de-5bf8-baa943f41098}">
+        <p14:section name="개념" id="{2d9cdf53-e602-e5c3-0b86-04e1f80bb274}">
           <p14:sldIdLst/>
         </p14:section>
-        <p14:section name="연습" id="{6d5e946f-7d20-5720-43d6-bd8ff4dc2a15}">
+        <p14:section name="연습" id="{18d2da92-69de-c1e5-62c8-f9b27fa7a42c}">
           <p14:sldIdLst/>
         </p14:section>
-        <p14:section name="확인" id="{f58ee1c0-a375-530a-ebcb-9a526fc1c085}">
+        <p14:section name="확인" id="{81428e08-c7da-1840-e17c-f75ae1ad212e}">
           <p14:sldIdLst>
             <p14:sldId id="266"/>
             <p14:sldId id="267"/>
           </p14:sldIdLst>
         </p14:section>
-        <p14:section name="정리" id="{8f9a2ca7-e378-cac6-abc7-1c287deac705}">
+        <p14:section name="정리" id="{c30bbd20-618c-8b4f-ac48-16b132e3d71b}">
           <p14:sldIdLst>
             <p14:sldId id="268"/>
           </p14:sldIdLst>
         </p14:section>
-        <p14:section name="보충" id="{d5cecb6a-8678-516c-23b7-103dd0be0646}">
+        <p14:section name="보충" id="{25be3bcf-2acf-8f3a-c34b-c891fe8d8fbc}">
           <p14:sldIdLst>
             <p14:sldId id="269"/>
           </p14:sldIdLst>
